--- a/artifacts/active/Figure8_open_problems_native_grouped.pptx
+++ b/artifacts/active/Figure8_open_problems_native_grouped.pptx
@@ -1080,7 +1080,7 @@
               </a:extLst>
             </p:cNvPr>
             <p:cNvSpPr>
-              <a:spLocks xmlns:a="http://schemas.openxmlformats.org/drawingml/2006/main" noGrp="1"/>
+              <a:spLocks xmlns:a="http://schemas.openxmlformats.org/drawingml/2006/main"/>
             </p:cNvSpPr>
             <p:nvPr/>
           </p:nvSpPr>
@@ -1136,7 +1136,7 @@
               </a:extLst>
             </p:cNvPr>
             <p:cNvSpPr>
-              <a:spLocks xmlns:a="http://schemas.openxmlformats.org/drawingml/2006/main" noGrp="1"/>
+              <a:spLocks xmlns:a="http://schemas.openxmlformats.org/drawingml/2006/main"/>
             </p:cNvSpPr>
             <p:nvPr/>
           </p:nvSpPr>
@@ -1177,7 +1177,7 @@
                   <a:ea typeface="Times New Roman"/>
                   <a:cs typeface="Times New Roman"/>
                 </a:rPr>
-                <a:t>The paper card exposes gaps at the interfaces between model, runtime, temporal module, and task contract.</a:t>
+                <a:t>Open questions connect model capabilities, reusable execution, temporal evidence, and task outcomes.</a:t>
               </a:r>
             </a:p>
           </p:txBody>
@@ -1207,7 +1207,7 @@
               </a:extLst>
             </p:cNvPr>
             <p:cNvSpPr>
-              <a:spLocks xmlns:a="http://schemas.openxmlformats.org/drawingml/2006/main" noGrp="1"/>
+              <a:spLocks xmlns:a="http://schemas.openxmlformats.org/drawingml/2006/main"/>
             </p:cNvSpPr>
             <p:nvPr/>
           </p:nvSpPr>
@@ -1242,7 +1242,7 @@
               </a:extLst>
             </p:cNvPr>
             <p:cNvSpPr>
-              <a:spLocks xmlns:a="http://schemas.openxmlformats.org/drawingml/2006/main" noGrp="1"/>
+              <a:spLocks xmlns:a="http://schemas.openxmlformats.org/drawingml/2006/main"/>
             </p:cNvSpPr>
             <p:nvPr/>
           </p:nvSpPr>
@@ -1283,7 +1283,7 @@
                   <a:ea typeface="Times New Roman"/>
                   <a:cs typeface="Times New Roman"/>
                 </a:rPr>
-                <a:t>Open problems exposed by the ledger</a:t>
+                <a:t>Open problems in agent construction</a:t>
               </a:r>
             </a:p>
           </p:txBody>
@@ -1298,7 +1298,7 @@
               </a:extLst>
             </p:cNvPr>
             <p:cNvSpPr>
-              <a:spLocks xmlns:a="http://schemas.openxmlformats.org/drawingml/2006/main" noGrp="1"/>
+              <a:spLocks xmlns:a="http://schemas.openxmlformats.org/drawingml/2006/main"/>
             </p:cNvSpPr>
             <p:nvPr/>
           </p:nvSpPr>
@@ -1339,7 +1339,7 @@
                   <a:ea typeface="Times New Roman"/>
                   <a:cs typeface="Times New Roman"/>
                 </a:rPr>
-                <a:t>Each gap links a missing capability to a layer and an evidence requirement.</a:t>
+                <a:t>Each question connects a system capability to the evidence needed to evaluate it.</a:t>
               </a:r>
             </a:p>
           </p:txBody>
@@ -1369,7 +1369,7 @@
               </a:extLst>
             </p:cNvPr>
             <p:cNvSpPr>
-              <a:spLocks xmlns:a="http://schemas.openxmlformats.org/drawingml/2006/main" noGrp="1"/>
+              <a:spLocks xmlns:a="http://schemas.openxmlformats.org/drawingml/2006/main"/>
             </p:cNvSpPr>
             <p:nvPr/>
           </p:nvSpPr>
@@ -1404,7 +1404,7 @@
               </a:extLst>
             </p:cNvPr>
             <p:cNvSpPr>
-              <a:spLocks xmlns:a="http://schemas.openxmlformats.org/drawingml/2006/main" noGrp="1"/>
+              <a:spLocks xmlns:a="http://schemas.openxmlformats.org/drawingml/2006/main"/>
             </p:cNvSpPr>
             <p:nvPr/>
           </p:nvSpPr>
@@ -1445,7 +1445,7 @@
                   <a:ea typeface="Times New Roman"/>
                   <a:cs typeface="Times New Roman"/>
                 </a:rPr>
-                <a:t>Temporal and numerical faithfulness</a:t>
+                <a:t>Temporal perception and execution</a:t>
               </a:r>
             </a:p>
           </p:txBody>
@@ -1460,7 +1460,7 @@
               </a:extLst>
             </p:cNvPr>
             <p:cNvSpPr>
-              <a:spLocks xmlns:a="http://schemas.openxmlformats.org/drawingml/2006/main" noGrp="1"/>
+              <a:spLocks xmlns:a="http://schemas.openxmlformats.org/drawingml/2006/main"/>
             </p:cNvSpPr>
             <p:nvPr/>
           </p:nvSpPr>
@@ -1501,7 +1501,7 @@
                   <a:ea typeface="Times New Roman"/>
                   <a:cs typeface="Times New Roman"/>
                 </a:rPr>
-                <a:t>Typed time operations, units, chronology guards, and end-to-end fidelity.</a:t>
+                <a:t>Connect temporal representations to precise numerical operations and checked outputs.</a:t>
               </a:r>
             </a:p>
           </p:txBody>
@@ -1516,7 +1516,7 @@
               </a:extLst>
             </p:cNvPr>
             <p:cNvSpPr>
-              <a:spLocks xmlns:a="http://schemas.openxmlformats.org/drawingml/2006/main" noGrp="1"/>
+              <a:spLocks xmlns:a="http://schemas.openxmlformats.org/drawingml/2006/main"/>
             </p:cNvSpPr>
             <p:nvPr/>
           </p:nvSpPr>
@@ -1551,7 +1551,7 @@
               </a:extLst>
             </p:cNvPr>
             <p:cNvSpPr>
-              <a:spLocks xmlns:a="http://schemas.openxmlformats.org/drawingml/2006/main" noGrp="1"/>
+              <a:spLocks xmlns:a="http://schemas.openxmlformats.org/drawingml/2006/main"/>
             </p:cNvSpPr>
             <p:nvPr/>
           </p:nvSpPr>
@@ -1592,7 +1592,7 @@
                   <a:ea typeface="Times New Roman"/>
                   <a:cs typeface="Times New Roman"/>
                 </a:rPr>
-                <a:t>GTS</a:t>
+                <a:t>LLM + GTS</a:t>
               </a:r>
             </a:p>
           </p:txBody>
@@ -1622,7 +1622,7 @@
               </a:extLst>
             </p:cNvPr>
             <p:cNvSpPr>
-              <a:spLocks xmlns:a="http://schemas.openxmlformats.org/drawingml/2006/main" noGrp="1"/>
+              <a:spLocks xmlns:a="http://schemas.openxmlformats.org/drawingml/2006/main"/>
             </p:cNvSpPr>
             <p:nvPr/>
           </p:nvSpPr>
@@ -1657,7 +1657,7 @@
               </a:extLst>
             </p:cNvPr>
             <p:cNvSpPr>
-              <a:spLocks xmlns:a="http://schemas.openxmlformats.org/drawingml/2006/main" noGrp="1"/>
+              <a:spLocks xmlns:a="http://schemas.openxmlformats.org/drawingml/2006/main"/>
             </p:cNvSpPr>
             <p:nvPr/>
           </p:nvSpPr>
@@ -1698,7 +1698,7 @@
                   <a:ea typeface="Times New Roman"/>
                   <a:cs typeface="Times New Roman"/>
                 </a:rPr>
-                <a:t>Temporal provenance and memory</a:t>
+                <a:t>Memory under changing information</a:t>
               </a:r>
             </a:p>
           </p:txBody>
@@ -1713,7 +1713,7 @@
               </a:extLst>
             </p:cNvPr>
             <p:cNvSpPr>
-              <a:spLocks xmlns:a="http://schemas.openxmlformats.org/drawingml/2006/main" noGrp="1"/>
+              <a:spLocks xmlns:a="http://schemas.openxmlformats.org/drawingml/2006/main"/>
             </p:cNvSpPr>
             <p:nvPr/>
           </p:nvSpPr>
@@ -1754,7 +1754,7 @@
                   <a:ea typeface="Times New Roman"/>
                   <a:cs typeface="Times New Roman"/>
                 </a:rPr>
-                <a:t>Point-in-time retrieval, revision history, regime awareness, and replayable evidence.</a:t>
+                <a:t>Track availability, revisions, and changing regimes when reusing past experience.</a:t>
               </a:r>
             </a:p>
           </p:txBody>
@@ -1769,7 +1769,7 @@
               </a:extLst>
             </p:cNvPr>
             <p:cNvSpPr>
-              <a:spLocks xmlns:a="http://schemas.openxmlformats.org/drawingml/2006/main" noGrp="1"/>
+              <a:spLocks xmlns:a="http://schemas.openxmlformats.org/drawingml/2006/main"/>
             </p:cNvSpPr>
             <p:nvPr/>
           </p:nvSpPr>
@@ -1804,7 +1804,7 @@
               </a:extLst>
             </p:cNvPr>
             <p:cNvSpPr>
-              <a:spLocks xmlns:a="http://schemas.openxmlformats.org/drawingml/2006/main" noGrp="1"/>
+              <a:spLocks xmlns:a="http://schemas.openxmlformats.org/drawingml/2006/main"/>
             </p:cNvSpPr>
             <p:nvPr/>
           </p:nvSpPr>
@@ -1875,7 +1875,7 @@
               </a:extLst>
             </p:cNvPr>
             <p:cNvSpPr>
-              <a:spLocks xmlns:a="http://schemas.openxmlformats.org/drawingml/2006/main" noGrp="1"/>
+              <a:spLocks xmlns:a="http://schemas.openxmlformats.org/drawingml/2006/main"/>
             </p:cNvSpPr>
             <p:nvPr/>
           </p:nvSpPr>
@@ -1910,7 +1910,7 @@
               </a:extLst>
             </p:cNvPr>
             <p:cNvSpPr>
-              <a:spLocks xmlns:a="http://schemas.openxmlformats.org/drawingml/2006/main" noGrp="1"/>
+              <a:spLocks xmlns:a="http://schemas.openxmlformats.org/drawingml/2006/main"/>
             </p:cNvSpPr>
             <p:nvPr/>
           </p:nvSpPr>
@@ -1951,7 +1951,7 @@
                   <a:ea typeface="Times New Roman"/>
                   <a:cs typeface="Times New Roman"/>
                 </a:rPr>
-                <a:t>Interface standardization</a:t>
+                <a:t>Transfer of learned procedures</a:t>
               </a:r>
             </a:p>
           </p:txBody>
@@ -1966,7 +1966,7 @@
               </a:extLst>
             </p:cNvPr>
             <p:cNvSpPr>
-              <a:spLocks xmlns:a="http://schemas.openxmlformats.org/drawingml/2006/main" noGrp="1"/>
+              <a:spLocks xmlns:a="http://schemas.openxmlformats.org/drawingml/2006/main"/>
             </p:cNvSpPr>
             <p:nvPr/>
           </p:nvSpPr>
@@ -2007,7 +2007,7 @@
                   <a:ea typeface="Times New Roman"/>
                   <a:cs typeface="Times New Roman"/>
                 </a:rPr>
-                <a:t>Shared schemas for temporal workspaces, tools, traces, and validators.</a:t>
+                <a:t>Test reusable procedures across datasets, domains, and task contracts.</a:t>
               </a:r>
             </a:p>
           </p:txBody>
@@ -2022,7 +2022,7 @@
               </a:extLst>
             </p:cNvPr>
             <p:cNvSpPr>
-              <a:spLocks xmlns:a="http://schemas.openxmlformats.org/drawingml/2006/main" noGrp="1"/>
+              <a:spLocks xmlns:a="http://schemas.openxmlformats.org/drawingml/2006/main"/>
             </p:cNvSpPr>
             <p:nvPr/>
           </p:nvSpPr>
@@ -2057,7 +2057,7 @@
               </a:extLst>
             </p:cNvPr>
             <p:cNvSpPr>
-              <a:spLocks xmlns:a="http://schemas.openxmlformats.org/drawingml/2006/main" noGrp="1"/>
+              <a:spLocks xmlns:a="http://schemas.openxmlformats.org/drawingml/2006/main"/>
             </p:cNvSpPr>
             <p:nvPr/>
           </p:nvSpPr>
@@ -2128,7 +2128,7 @@
               </a:extLst>
             </p:cNvPr>
             <p:cNvSpPr>
-              <a:spLocks xmlns:a="http://schemas.openxmlformats.org/drawingml/2006/main" noGrp="1"/>
+              <a:spLocks xmlns:a="http://schemas.openxmlformats.org/drawingml/2006/main"/>
             </p:cNvSpPr>
             <p:nvPr/>
           </p:nvSpPr>
@@ -2163,7 +2163,7 @@
               </a:extLst>
             </p:cNvPr>
             <p:cNvSpPr>
-              <a:spLocks xmlns:a="http://schemas.openxmlformats.org/drawingml/2006/main" noGrp="1"/>
+              <a:spLocks xmlns:a="http://schemas.openxmlformats.org/drawingml/2006/main"/>
             </p:cNvSpPr>
             <p:nvPr/>
           </p:nvSpPr>
@@ -2204,7 +2204,7 @@
                   <a:ea typeface="Times New Roman"/>
                   <a:cs typeface="Times New Roman"/>
                 </a:rPr>
-                <a:t>Safe component evolution</a:t>
+                <a:t>Evidence-sensitive evaluation</a:t>
               </a:r>
             </a:p>
           </p:txBody>
@@ -2219,7 +2219,7 @@
               </a:extLst>
             </p:cNvPr>
             <p:cNvSpPr>
-              <a:spLocks xmlns:a="http://schemas.openxmlformats.org/drawingml/2006/main" noGrp="1"/>
+              <a:spLocks xmlns:a="http://schemas.openxmlformats.org/drawingml/2006/main"/>
             </p:cNvSpPr>
             <p:nvPr/>
           </p:nvSpPr>
@@ -2260,7 +2260,7 @@
                   <a:ea typeface="Times New Roman"/>
                   <a:cs typeface="Times New Roman"/>
                 </a:rPr>
-                <a:t>Regression checks and held-out temporal tests for new tools, policies, and memories.</a:t>
+                <a:t>Measure how information quality, tool use, and validation affect the final result.</a:t>
               </a:r>
             </a:p>
           </p:txBody>
@@ -2275,7 +2275,7 @@
               </a:extLst>
             </p:cNvPr>
             <p:cNvSpPr>
-              <a:spLocks xmlns:a="http://schemas.openxmlformats.org/drawingml/2006/main" noGrp="1"/>
+              <a:spLocks xmlns:a="http://schemas.openxmlformats.org/drawingml/2006/main"/>
             </p:cNvSpPr>
             <p:nvPr/>
           </p:nvSpPr>
@@ -2310,7 +2310,7 @@
               </a:extLst>
             </p:cNvPr>
             <p:cNvSpPr>
-              <a:spLocks xmlns:a="http://schemas.openxmlformats.org/drawingml/2006/main" noGrp="1"/>
+              <a:spLocks xmlns:a="http://schemas.openxmlformats.org/drawingml/2006/main"/>
             </p:cNvSpPr>
             <p:nvPr/>
           </p:nvSpPr>
@@ -2351,7 +2351,7 @@
                   <a:ea typeface="Times New Roman"/>
                   <a:cs typeface="Times New Roman"/>
                 </a:rPr>
-                <a:t>GH</a:t>
+                <a:t>GH + GTS</a:t>
               </a:r>
             </a:p>
           </p:txBody>
@@ -2381,7 +2381,7 @@
               </a:extLst>
             </p:cNvPr>
             <p:cNvSpPr>
-              <a:spLocks xmlns:a="http://schemas.openxmlformats.org/drawingml/2006/main" noGrp="1"/>
+              <a:spLocks xmlns:a="http://schemas.openxmlformats.org/drawingml/2006/main"/>
             </p:cNvSpPr>
             <p:nvPr/>
           </p:nvSpPr>
@@ -2416,7 +2416,7 @@
               </a:extLst>
             </p:cNvPr>
             <p:cNvSpPr>
-              <a:spLocks xmlns:a="http://schemas.openxmlformats.org/drawingml/2006/main" noGrp="1"/>
+              <a:spLocks xmlns:a="http://schemas.openxmlformats.org/drawingml/2006/main"/>
             </p:cNvSpPr>
             <p:nvPr/>
           </p:nvSpPr>
@@ -2457,7 +2457,7 @@
                   <a:ea typeface="Times New Roman"/>
                   <a:cs typeface="Times New Roman"/>
                 </a:rPr>
-                <a:t>Decision-centered evaluation</a:t>
+                <a:t>Prediction-to-decision feedback</a:t>
               </a:r>
             </a:p>
           </p:txBody>
@@ -2472,7 +2472,7 @@
               </a:extLst>
             </p:cNvPr>
             <p:cNvSpPr>
-              <a:spLocks xmlns:a="http://schemas.openxmlformats.org/drawingml/2006/main" noGrp="1"/>
+              <a:spLocks xmlns:a="http://schemas.openxmlformats.org/drawingml/2006/main"/>
             </p:cNvSpPr>
             <p:nvPr/>
           </p:nvSpPr>
@@ -2513,7 +2513,7 @@
                   <a:ea typeface="Times New Roman"/>
                   <a:cs typeface="Times New Roman"/>
                 </a:rPr>
-                <a:t>Connect forecasts and diagnoses to action quality, cost, uncertainty, and review.</a:t>
+                <a:t>Evaluate actions, delayed outcomes, uncertainty, and the cost of prediction errors.</a:t>
               </a:r>
             </a:p>
           </p:txBody>
@@ -2528,7 +2528,7 @@
               </a:extLst>
             </p:cNvPr>
             <p:cNvSpPr>
-              <a:spLocks xmlns:a="http://schemas.openxmlformats.org/drawingml/2006/main" noGrp="1"/>
+              <a:spLocks xmlns:a="http://schemas.openxmlformats.org/drawingml/2006/main"/>
             </p:cNvSpPr>
             <p:nvPr/>
           </p:nvSpPr>
@@ -2563,7 +2563,7 @@
               </a:extLst>
             </p:cNvPr>
             <p:cNvSpPr>
-              <a:spLocks xmlns:a="http://schemas.openxmlformats.org/drawingml/2006/main" noGrp="1"/>
+              <a:spLocks xmlns:a="http://schemas.openxmlformats.org/drawingml/2006/main"/>
             </p:cNvSpPr>
             <p:nvPr/>
           </p:nvSpPr>
@@ -2634,7 +2634,7 @@
               </a:extLst>
             </p:cNvPr>
             <p:cNvSpPr>
-              <a:spLocks xmlns:a="http://schemas.openxmlformats.org/drawingml/2006/main" noGrp="1"/>
+              <a:spLocks xmlns:a="http://schemas.openxmlformats.org/drawingml/2006/main"/>
             </p:cNvSpPr>
             <p:nvPr/>
           </p:nvSpPr>
@@ -2669,7 +2669,7 @@
               </a:extLst>
             </p:cNvPr>
             <p:cNvSpPr>
-              <a:spLocks xmlns:a="http://schemas.openxmlformats.org/drawingml/2006/main" noGrp="1"/>
+              <a:spLocks xmlns:a="http://schemas.openxmlformats.org/drawingml/2006/main"/>
             </p:cNvSpPr>
             <p:nvPr/>
           </p:nvSpPr>
@@ -2725,7 +2725,7 @@
               </a:extLst>
             </p:cNvPr>
             <p:cNvSpPr>
-              <a:spLocks xmlns:a="http://schemas.openxmlformats.org/drawingml/2006/main" noGrp="1"/>
+              <a:spLocks xmlns:a="http://schemas.openxmlformats.org/drawingml/2006/main"/>
             </p:cNvSpPr>
             <p:nvPr/>
           </p:nvSpPr>
@@ -2766,7 +2766,7 @@
                   <a:ea typeface="Times New Roman"/>
                   <a:cs typeface="Times New Roman"/>
                 </a:rPr>
-                <a:t>Three cards show different contribution loci.</a:t>
+                <a:t>Examples connect capabilities to their use in a system.</a:t>
               </a:r>
             </a:p>
           </p:txBody>
@@ -2781,7 +2781,7 @@
               </a:extLst>
             </p:cNvPr>
             <p:cNvSpPr>
-              <a:spLocks xmlns:a="http://schemas.openxmlformats.org/drawingml/2006/main" noGrp="1"/>
+              <a:spLocks xmlns:a="http://schemas.openxmlformats.org/drawingml/2006/main"/>
             </p:cNvSpPr>
             <p:nvPr/>
           </p:nvSpPr>
@@ -2816,7 +2816,7 @@
               </a:extLst>
             </p:cNvPr>
             <p:cNvSpPr>
-              <a:spLocks xmlns:a="http://schemas.openxmlformats.org/drawingml/2006/main" noGrp="1"/>
+              <a:spLocks xmlns:a="http://schemas.openxmlformats.org/drawingml/2006/main"/>
             </p:cNvSpPr>
             <p:nvPr/>
           </p:nvSpPr>
@@ -2857,7 +2857,7 @@
                   <a:ea typeface="Times New Roman"/>
                   <a:cs typeface="Times New Roman"/>
                 </a:rPr>
-                <a:t>Paper Card</a:t>
+                <a:t>Evidence record</a:t>
               </a:r>
             </a:p>
           </p:txBody>
@@ -2887,7 +2887,7 @@
               </a:extLst>
             </p:cNvPr>
             <p:cNvSpPr>
-              <a:spLocks xmlns:a="http://schemas.openxmlformats.org/drawingml/2006/main" noGrp="1"/>
+              <a:spLocks xmlns:a="http://schemas.openxmlformats.org/drawingml/2006/main"/>
             </p:cNvSpPr>
             <p:nvPr/>
           </p:nvSpPr>
@@ -2922,7 +2922,7 @@
               </a:extLst>
             </p:cNvPr>
             <p:cNvSpPr>
-              <a:spLocks xmlns:a="http://schemas.openxmlformats.org/drawingml/2006/main" noGrp="1"/>
+              <a:spLocks xmlns:a="http://schemas.openxmlformats.org/drawingml/2006/main"/>
             </p:cNvSpPr>
             <p:nvPr/>
           </p:nvSpPr>
@@ -2978,7 +2978,7 @@
               </a:extLst>
             </p:cNvPr>
             <p:cNvSpPr>
-              <a:spLocks xmlns:a="http://schemas.openxmlformats.org/drawingml/2006/main" noGrp="1"/>
+              <a:spLocks xmlns:a="http://schemas.openxmlformats.org/drawingml/2006/main"/>
             </p:cNvSpPr>
             <p:nvPr/>
           </p:nvSpPr>
@@ -3034,7 +3034,7 @@
               </a:extLst>
             </p:cNvPr>
             <p:cNvSpPr>
-              <a:spLocks xmlns:a="http://schemas.openxmlformats.org/drawingml/2006/main" noGrp="1"/>
+              <a:spLocks xmlns:a="http://schemas.openxmlformats.org/drawingml/2006/main"/>
             </p:cNvSpPr>
             <p:nvPr/>
           </p:nvSpPr>
@@ -3105,7 +3105,7 @@
               </a:extLst>
             </p:cNvPr>
             <p:cNvSpPr>
-              <a:spLocks xmlns:a="http://schemas.openxmlformats.org/drawingml/2006/main" noGrp="1"/>
+              <a:spLocks xmlns:a="http://schemas.openxmlformats.org/drawingml/2006/main"/>
             </p:cNvSpPr>
             <p:nvPr/>
           </p:nvSpPr>
@@ -3140,7 +3140,7 @@
               </a:extLst>
             </p:cNvPr>
             <p:cNvSpPr>
-              <a:spLocks xmlns:a="http://schemas.openxmlformats.org/drawingml/2006/main" noGrp="1"/>
+              <a:spLocks xmlns:a="http://schemas.openxmlformats.org/drawingml/2006/main"/>
             </p:cNvSpPr>
             <p:nvPr/>
           </p:nvSpPr>
@@ -3196,7 +3196,7 @@
               </a:extLst>
             </p:cNvPr>
             <p:cNvSpPr>
-              <a:spLocks xmlns:a="http://schemas.openxmlformats.org/drawingml/2006/main" noGrp="1"/>
+              <a:spLocks xmlns:a="http://schemas.openxmlformats.org/drawingml/2006/main"/>
             </p:cNvSpPr>
             <p:nvPr/>
           </p:nvSpPr>
@@ -3237,7 +3237,7 @@
                   <a:ea typeface="Times New Roman"/>
                   <a:cs typeface="Times New Roman"/>
                 </a:rPr>
-                <a:t>GTS runtime</a:t>
+                <a:t>General Harness</a:t>
               </a:r>
             </a:p>
           </p:txBody>
@@ -3252,7 +3252,7 @@
               </a:extLst>
             </p:cNvPr>
             <p:cNvSpPr>
-              <a:spLocks xmlns:a="http://schemas.openxmlformats.org/drawingml/2006/main" noGrp="1"/>
+              <a:spLocks xmlns:a="http://schemas.openxmlformats.org/drawingml/2006/main"/>
             </p:cNvSpPr>
             <p:nvPr/>
           </p:nvSpPr>
@@ -3293,7 +3293,7 @@
                   <a:ea typeface="Times New Roman"/>
                   <a:cs typeface="Times New Roman"/>
                 </a:rPr>
-                <a:t>Temporal tools, auditable trajectories, memory, and capability evolution become executable.</a:t>
+                <a:t>Executed trajectories are compared and distilled into reusable experience.</a:t>
               </a:r>
             </a:p>
           </p:txBody>
@@ -3323,7 +3323,7 @@
               </a:extLst>
             </p:cNvPr>
             <p:cNvSpPr>
-              <a:spLocks xmlns:a="http://schemas.openxmlformats.org/drawingml/2006/main" noGrp="1"/>
+              <a:spLocks xmlns:a="http://schemas.openxmlformats.org/drawingml/2006/main"/>
             </p:cNvSpPr>
             <p:nvPr/>
           </p:nvSpPr>
@@ -3358,7 +3358,7 @@
               </a:extLst>
             </p:cNvPr>
             <p:cNvSpPr>
-              <a:spLocks xmlns:a="http://schemas.openxmlformats.org/drawingml/2006/main" noGrp="1"/>
+              <a:spLocks xmlns:a="http://schemas.openxmlformats.org/drawingml/2006/main"/>
             </p:cNvSpPr>
             <p:nvPr/>
           </p:nvSpPr>
@@ -3414,7 +3414,7 @@
               </a:extLst>
             </p:cNvPr>
             <p:cNvSpPr>
-              <a:spLocks xmlns:a="http://schemas.openxmlformats.org/drawingml/2006/main" noGrp="1"/>
+              <a:spLocks xmlns:a="http://schemas.openxmlformats.org/drawingml/2006/main"/>
             </p:cNvSpPr>
             <p:nvPr/>
           </p:nvSpPr>
@@ -3470,7 +3470,7 @@
               </a:extLst>
             </p:cNvPr>
             <p:cNvSpPr>
-              <a:spLocks xmlns:a="http://schemas.openxmlformats.org/drawingml/2006/main" noGrp="1"/>
+              <a:spLocks xmlns:a="http://schemas.openxmlformats.org/drawingml/2006/main"/>
             </p:cNvSpPr>
             <p:nvPr/>
           </p:nvSpPr>
@@ -3511,7 +3511,7 @@
                   <a:ea typeface="Times New Roman"/>
                   <a:cs typeface="Times New Roman"/>
                 </a:rPr>
-                <a:t>Models, datasets, artifacts, budgets, and recoverable execution support reproducible evaluation.</a:t>
+                <a:t>Forecasting models and datasets provide resources for task evaluation.</a:t>
               </a:r>
             </a:p>
           </p:txBody>
@@ -3541,7 +3541,7 @@
               </a:extLst>
             </p:cNvPr>
             <p:cNvSpPr>
-              <a:spLocks xmlns:a="http://schemas.openxmlformats.org/drawingml/2006/main" noGrp="1"/>
+              <a:spLocks xmlns:a="http://schemas.openxmlformats.org/drawingml/2006/main"/>
             </p:cNvSpPr>
             <p:nvPr/>
           </p:nvSpPr>
@@ -3576,7 +3576,7 @@
               </a:extLst>
             </p:cNvPr>
             <p:cNvSpPr>
-              <a:spLocks xmlns:a="http://schemas.openxmlformats.org/drawingml/2006/main" noGrp="1"/>
+              <a:spLocks xmlns:a="http://schemas.openxmlformats.org/drawingml/2006/main"/>
             </p:cNvSpPr>
             <p:nvPr/>
           </p:nvSpPr>
@@ -3647,7 +3647,7 @@
               </a:extLst>
             </p:cNvPr>
             <p:cNvSpPr>
-              <a:spLocks xmlns:a="http://schemas.openxmlformats.org/drawingml/2006/main" noGrp="1"/>
+              <a:spLocks xmlns:a="http://schemas.openxmlformats.org/drawingml/2006/main"/>
             </p:cNvSpPr>
             <p:nvPr/>
           </p:nvSpPr>
@@ -3682,7 +3682,7 @@
               </a:extLst>
             </p:cNvPr>
             <p:cNvSpPr>
-              <a:spLocks xmlns:a="http://schemas.openxmlformats.org/drawingml/2006/main" noGrp="1"/>
+              <a:spLocks xmlns:a="http://schemas.openxmlformats.org/drawingml/2006/main"/>
             </p:cNvSpPr>
             <p:nvPr/>
           </p:nvSpPr>
@@ -3753,7 +3753,7 @@
               </a:extLst>
             </p:cNvPr>
             <p:cNvSpPr>
-              <a:spLocks xmlns:a="http://schemas.openxmlformats.org/drawingml/2006/main" noGrp="1"/>
+              <a:spLocks xmlns:a="http://schemas.openxmlformats.org/drawingml/2006/main"/>
             </p:cNvSpPr>
             <p:nvPr/>
           </p:nvSpPr>
@@ -3788,7 +3788,7 @@
               </a:extLst>
             </p:cNvPr>
             <p:cNvSpPr>
-              <a:spLocks xmlns:a="http://schemas.openxmlformats.org/drawingml/2006/main" noGrp="1"/>
+              <a:spLocks xmlns:a="http://schemas.openxmlformats.org/drawingml/2006/main"/>
             </p:cNvSpPr>
             <p:nvPr/>
           </p:nvSpPr>
@@ -3859,7 +3859,7 @@
               </a:extLst>
             </p:cNvPr>
             <p:cNvSpPr>
-              <a:spLocks xmlns:a="http://schemas.openxmlformats.org/drawingml/2006/main" noGrp="1"/>
+              <a:spLocks xmlns:a="http://schemas.openxmlformats.org/drawingml/2006/main"/>
             </p:cNvSpPr>
             <p:nvPr/>
           </p:nvSpPr>
@@ -3894,7 +3894,7 @@
               </a:extLst>
             </p:cNvPr>
             <p:cNvSpPr>
-              <a:spLocks xmlns:a="http://schemas.openxmlformats.org/drawingml/2006/main" noGrp="1"/>
+              <a:spLocks xmlns:a="http://schemas.openxmlformats.org/drawingml/2006/main"/>
             </p:cNvSpPr>
             <p:nvPr/>
           </p:nvSpPr>
@@ -3965,7 +3965,7 @@
               </a:extLst>
             </p:cNvPr>
             <p:cNvSpPr>
-              <a:spLocks xmlns:a="http://schemas.openxmlformats.org/drawingml/2006/main" noGrp="1"/>
+              <a:spLocks xmlns:a="http://schemas.openxmlformats.org/drawingml/2006/main"/>
             </p:cNvSpPr>
             <p:nvPr/>
           </p:nvSpPr>
@@ -4006,7 +4006,7 @@
                   <a:ea typeface="Times New Roman"/>
                   <a:cs typeface="Times New Roman"/>
                 </a:rPr>
-                <a:t>The paper card records the claim, module, task contract, and supporting evidence for each case.</a:t>
+                <a:t>Source passages connect each case to its claims, modules, and task requirements.</a:t>
               </a:r>
             </a:p>
           </p:txBody>
